--- a/tests/fixtures/good.pptx
+++ b/tests/fixtures/good.pptx
@@ -1433,20 +1433,13 @@
               <a:buNone/>
             </a:pPr>
             <a:r>
-              <a:rPr lang="en-US" sz="2000" b="1" u="sng" dirty="0">
+              <a:rPr lang="en-US" sz="2000" b="1" dirty="0">
                 <a:solidFill>
                   <a:srgbClr val="FFFFFF"/>
                 </a:solidFill>
                 <a:latin typeface="Helvetica Neue" pitchFamily="34" charset="0"/>
                 <a:ea typeface="Helvetica Neue" pitchFamily="34" charset="-122"/>
                 <a:cs typeface="Helvetica Neue" pitchFamily="34" charset="-120"/>
-                <a:hlinkClick r:id="rId1" action="ppaction://hlinksldjump" tooltip="">
-                  <a:extLst>
-                    <a:ext uri="{A12FA001-AC4F-418D-AE19-62706E023703}">
-                      <ahyp:hlinkClr xmlns:ahyp="http://schemas.microsoft.com/office/drawing/2018/hyperlinkcolor" val="tx"/>
-                    </a:ext>
-                  </a:extLst>
-                </a:hlinkClick>
               </a:rPr>
               <a:t>Sustainability</a:t>
             </a:r>
@@ -1489,20 +1482,13 @@
               <a:buNone/>
             </a:pPr>
             <a:r>
-              <a:rPr lang="en-US" sz="2000" b="1" u="sng" dirty="0">
+              <a:rPr lang="en-US" sz="2000" b="1" dirty="0">
                 <a:solidFill>
                   <a:srgbClr val="FFFFFF"/>
                 </a:solidFill>
                 <a:latin typeface="Helvetica Neue" pitchFamily="34" charset="0"/>
                 <a:ea typeface="Helvetica Neue" pitchFamily="34" charset="-122"/>
                 <a:cs typeface="Helvetica Neue" pitchFamily="34" charset="-120"/>
-                <a:hlinkClick r:id="rId2" action="ppaction://hlinksldjump" tooltip="">
-                  <a:extLst>
-                    <a:ext uri="{A12FA001-AC4F-418D-AE19-62706E023703}">
-                      <ahyp:hlinkClr xmlns:ahyp="http://schemas.microsoft.com/office/drawing/2018/hyperlinkcolor" val="tx"/>
-                    </a:ext>
-                  </a:extLst>
-                </a:hlinkClick>
               </a:rPr>
               <a:t>Innovation</a:t>
             </a:r>
@@ -1545,20 +1531,13 @@
               <a:buNone/>
             </a:pPr>
             <a:r>
-              <a:rPr lang="en-US" sz="2000" b="1" u="sng" dirty="0">
+              <a:rPr lang="en-US" sz="2000" b="1" dirty="0">
                 <a:solidFill>
                   <a:srgbClr val="FFFFFF"/>
                 </a:solidFill>
                 <a:latin typeface="Helvetica Neue" pitchFamily="34" charset="0"/>
                 <a:ea typeface="Helvetica Neue" pitchFamily="34" charset="-122"/>
                 <a:cs typeface="Helvetica Neue" pitchFamily="34" charset="-120"/>
-                <a:hlinkClick r:id="rId3" action="ppaction://hlinksldjump" tooltip="">
-                  <a:extLst>
-                    <a:ext uri="{A12FA001-AC4F-418D-AE19-62706E023703}">
-                      <ahyp:hlinkClr xmlns:ahyp="http://schemas.microsoft.com/office/drawing/2018/hyperlinkcolor" val="tx"/>
-                    </a:ext>
-                  </a:extLst>
-                </a:hlinkClick>
               </a:rPr>
               <a:t>People</a:t>
             </a:r>
@@ -1601,20 +1580,13 @@
               <a:buNone/>
             </a:pPr>
             <a:r>
-              <a:rPr lang="en-US" sz="2000" b="1" u="sng" dirty="0">
+              <a:rPr lang="en-US" sz="2000" b="1" dirty="0">
                 <a:solidFill>
                   <a:srgbClr val="FFFFFF"/>
                 </a:solidFill>
                 <a:latin typeface="Helvetica Neue" pitchFamily="34" charset="0"/>
                 <a:ea typeface="Helvetica Neue" pitchFamily="34" charset="-122"/>
                 <a:cs typeface="Helvetica Neue" pitchFamily="34" charset="-120"/>
-                <a:hlinkClick r:id="rId4" action="ppaction://hlinksldjump" tooltip="">
-                  <a:extLst>
-                    <a:ext uri="{A12FA001-AC4F-418D-AE19-62706E023703}">
-                      <ahyp:hlinkClr xmlns:ahyp="http://schemas.microsoft.com/office/drawing/2018/hyperlinkcolor" val="tx"/>
-                    </a:ext>
-                  </a:extLst>
-                </a:hlinkClick>
               </a:rPr>
               <a:t>Contact</a:t>
             </a:r>
@@ -1802,20 +1774,13 @@
               <a:buNone/>
             </a:pPr>
             <a:r>
-              <a:rPr lang="en-US" sz="1400" b="1" u="sng" dirty="0">
+              <a:rPr lang="en-US" sz="1400" b="1" dirty="0">
                 <a:solidFill>
                   <a:srgbClr val="FFFFFF"/>
                 </a:solidFill>
                 <a:latin typeface="Helvetica Neue" pitchFamily="34" charset="0"/>
                 <a:ea typeface="Helvetica Neue" pitchFamily="34" charset="-122"/>
                 <a:cs typeface="Helvetica Neue" pitchFamily="34" charset="-120"/>
-                <a:hlinkClick r:id="rId1" action="ppaction://hlinksldjump" tooltip="">
-                  <a:extLst>
-                    <a:ext uri="{A12FA001-AC4F-418D-AE19-62706E023703}">
-                      <ahyp:hlinkClr xmlns:ahyp="http://schemas.microsoft.com/office/drawing/2018/hyperlinkcolor" val="tx"/>
-                    </a:ext>
-                  </a:extLst>
-                </a:hlinkClick>
               </a:rPr>
               <a:t>Home</a:t>
             </a:r>
@@ -1964,20 +1929,13 @@
               <a:buNone/>
             </a:pPr>
             <a:r>
-              <a:rPr lang="en-US" sz="1400" b="1" u="sng" dirty="0">
+              <a:rPr lang="en-US" sz="1400" b="1" dirty="0">
                 <a:solidFill>
                   <a:srgbClr val="FFFFFF"/>
                 </a:solidFill>
                 <a:latin typeface="Helvetica Neue" pitchFamily="34" charset="0"/>
                 <a:ea typeface="Helvetica Neue" pitchFamily="34" charset="-122"/>
                 <a:cs typeface="Helvetica Neue" pitchFamily="34" charset="-120"/>
-                <a:hlinkClick r:id="rId1" action="ppaction://hlinksldjump" tooltip="">
-                  <a:extLst>
-                    <a:ext uri="{A12FA001-AC4F-418D-AE19-62706E023703}">
-                      <ahyp:hlinkClr xmlns:ahyp="http://schemas.microsoft.com/office/drawing/2018/hyperlinkcolor" val="tx"/>
-                    </a:ext>
-                  </a:extLst>
-                </a:hlinkClick>
               </a:rPr>
               <a:t>Home</a:t>
             </a:r>
@@ -2126,20 +2084,13 @@
               <a:buNone/>
             </a:pPr>
             <a:r>
-              <a:rPr lang="en-US" sz="1400" b="1" u="sng" dirty="0">
+              <a:rPr lang="en-US" sz="1400" b="1" dirty="0">
                 <a:solidFill>
                   <a:srgbClr val="FFFFFF"/>
                 </a:solidFill>
                 <a:latin typeface="Helvetica Neue" pitchFamily="34" charset="0"/>
                 <a:ea typeface="Helvetica Neue" pitchFamily="34" charset="-122"/>
                 <a:cs typeface="Helvetica Neue" pitchFamily="34" charset="-120"/>
-                <a:hlinkClick r:id="rId1" action="ppaction://hlinksldjump" tooltip="">
-                  <a:extLst>
-                    <a:ext uri="{A12FA001-AC4F-418D-AE19-62706E023703}">
-                      <ahyp:hlinkClr xmlns:ahyp="http://schemas.microsoft.com/office/drawing/2018/hyperlinkcolor" val="tx"/>
-                    </a:ext>
-                  </a:extLst>
-                </a:hlinkClick>
               </a:rPr>
               <a:t>Home</a:t>
             </a:r>
@@ -2288,20 +2239,13 @@
               <a:buNone/>
             </a:pPr>
             <a:r>
-              <a:rPr lang="en-US" sz="1400" b="1" u="sng" dirty="0">
+              <a:rPr lang="en-US" sz="1400" b="1" dirty="0">
                 <a:solidFill>
                   <a:srgbClr val="FFFFFF"/>
                 </a:solidFill>
                 <a:latin typeface="Helvetica Neue" pitchFamily="34" charset="0"/>
                 <a:ea typeface="Helvetica Neue" pitchFamily="34" charset="-122"/>
                 <a:cs typeface="Helvetica Neue" pitchFamily="34" charset="-120"/>
-                <a:hlinkClick r:id="rId1" action="ppaction://hlinksldjump" tooltip="">
-                  <a:extLst>
-                    <a:ext uri="{A12FA001-AC4F-418D-AE19-62706E023703}">
-                      <ahyp:hlinkClr xmlns:ahyp="http://schemas.microsoft.com/office/drawing/2018/hyperlinkcolor" val="tx"/>
-                    </a:ext>
-                  </a:extLst>
-                </a:hlinkClick>
               </a:rPr>
               <a:t>Home</a:t>
             </a:r>

--- a/tests/fixtures/good.pptx
+++ b/tests/fixtures/good.pptx
@@ -11,9 +11,10 @@
     <p:sldId id="259" r:id="rId5"/>
     <p:sldId id="260" r:id="rId6"/>
     <p:sldId id="261" r:id="rId7"/>
+    <p:sldId id="262" r:id="rId8"/>
   </p:sldIdLst>
   <p:notesMasterIdLst>
-    <p:notesMasterId r:id="rId8"/>
+    <p:notesMasterId r:id="rId9"/>
   </p:notesMasterIdLst>
   <p:sldSz cx="12191695" cy="6858000"/>
   <p:notesSz cx="6858000" cy="12191695"/>
@@ -989,6 +990,94 @@
 </p:notes>
 </file>
 
+<file path=ppt/notesSlides/notesSlide7.xml><?xml version="1.0" encoding="utf-8"?>
+<p:notes xmlns:a="http://schemas.openxmlformats.org/drawingml/2006/main" xmlns:r="http://schemas.openxmlformats.org/officeDocument/2006/relationships" xmlns:p="http://schemas.openxmlformats.org/presentationml/2006/main">
+  <p:cSld>
+    <p:spTree>
+      <p:nvGrpSpPr>
+        <p:cNvPr id="1" name=""/>
+        <p:cNvGrpSpPr/>
+        <p:nvPr/>
+      </p:nvGrpSpPr>
+      <p:grpSpPr>
+        <a:xfrm>
+          <a:off x="0" y="0"/>
+          <a:ext cx="0" cy="0"/>
+          <a:chOff x="0" y="0"/>
+          <a:chExt cx="0" cy="0"/>
+        </a:xfrm>
+      </p:grpSpPr>
+      <p:sp>
+        <p:nvSpPr>
+          <p:cNvPr id="2" name="Slide Image Placeholder 1"/>
+          <p:cNvSpPr>
+            <a:spLocks noGrp="1" noRot="1" noChangeAspect="1"/>
+          </p:cNvSpPr>
+          <p:nvPr>
+            <p:ph type="sldImg"/>
+          </p:nvPr>
+        </p:nvSpPr>
+        <p:spPr/>
+      </p:sp>
+      <p:sp>
+        <p:nvSpPr>
+          <p:cNvPr id="3" name="Notes Placeholder 2"/>
+          <p:cNvSpPr>
+            <a:spLocks noGrp="1"/>
+          </p:cNvSpPr>
+          <p:nvPr>
+            <p:ph type="body" idx="1"/>
+          </p:nvPr>
+        </p:nvSpPr>
+        <p:spPr/>
+        <p:txBody>
+          <a:bodyPr/>
+          <a:lstStyle/>
+          <a:p>
+            <a:r>
+              <a:rPr lang="en-US" dirty="0"/>
+              <a:t/>
+            </a:r>
+            <a:endParaRPr lang="en-US" dirty="0"/>
+          </a:p>
+        </p:txBody>
+      </p:sp>
+      <p:sp>
+        <p:nvSpPr>
+          <p:cNvPr id="4" name="Slide Number Placeholder 3"/>
+          <p:cNvSpPr>
+            <a:spLocks noGrp="1"/>
+          </p:cNvSpPr>
+          <p:nvPr>
+            <p:ph type="sldNum" sz="quarter" idx="10"/>
+          </p:nvPr>
+        </p:nvSpPr>
+        <p:spPr/>
+        <p:txBody>
+          <a:bodyPr/>
+          <a:lstStyle/>
+          <a:p>
+            <a:fld id="{F7021451-1387-4CA6-816F-3879F97B5CBC}" type="slidenum">
+              <a:rPr lang="en-US"/>
+              <a:t>7</a:t>
+            </a:fld>
+            <a:endParaRPr lang="en-US"/>
+          </a:p>
+        </p:txBody>
+      </p:sp>
+    </p:spTree>
+    <p:extLst>
+      <p:ext uri="{BB962C8B-B14F-4D97-AF65-F5344CB8AC3E}">
+        <p14:creationId xmlns:p14="http://schemas.microsoft.com/office/powerpoint/2010/main" val="1024086991"/>
+      </p:ext>
+    </p:extLst>
+  </p:cSld>
+  <p:clrMapOvr>
+    <a:masterClrMapping/>
+  </p:clrMapOvr>
+</p:notes>
+</file>
+
 <file path=ppt/slideLayouts/slideLayout1.xml><?xml version="1.0" encoding="utf-8"?>
 <p:sldLayout xmlns:a="http://schemas.openxmlformats.org/drawingml/2006/main" xmlns:r="http://schemas.openxmlformats.org/officeDocument/2006/relationships" xmlns:p="http://schemas.openxmlformats.org/presentationml/2006/main" preserve="1">
   <p:cSld name="DEFAULT">
@@ -1788,6 +1877,51 @@
           </a:p>
         </p:txBody>
       </p:sp>
+      <p:sp>
+        <p:nvSpPr>
+          <p:cNvPr id="5" name="BTN_Next">
+            <a:hlinkClick r:id="rId2" tooltip="" action="ppaction://hlinksldjump"/>
+          </p:cNvPr>
+          <p:cNvSpPr/>
+          <p:nvPr/>
+        </p:nvSpPr>
+        <p:spPr>
+          <a:xfrm>
+            <a:off x="2377440" y="5943600"/>
+            <a:ext cx="1645920" cy="548640"/>
+          </a:xfrm>
+          <a:prstGeom prst="roundRect">
+            <a:avLst>
+              <a:gd name="adj" fmla="val 25000"/>
+            </a:avLst>
+          </a:prstGeom>
+          <a:solidFill>
+            <a:srgbClr val="2E7D6B"/>
+          </a:solidFill>
+          <a:ln/>
+        </p:spPr>
+        <p:txBody>
+          <a:bodyPr wrap="square" rtlCol="0" anchor="ctr"/>
+          <a:lstStyle/>
+          <a:p>
+            <a:pPr algn="ctr" indent="0" marL="0">
+              <a:buNone/>
+            </a:pPr>
+            <a:r>
+              <a:rPr lang="en-US" sz="1400" b="1" dirty="0">
+                <a:solidFill>
+                  <a:srgbClr val="FFFFFF"/>
+                </a:solidFill>
+                <a:latin typeface="Helvetica Neue" pitchFamily="34" charset="0"/>
+                <a:ea typeface="Helvetica Neue" pitchFamily="34" charset="-122"/>
+                <a:cs typeface="Helvetica Neue" pitchFamily="34" charset="-120"/>
+              </a:rPr>
+              <a:t>Next</a:t>
+            </a:r>
+            <a:endParaRPr lang="en-US" sz="1400" dirty="0"/>
+          </a:p>
+        </p:txBody>
+      </p:sp>
     </p:spTree>
   </p:cSld>
   <p:clrMapOvr>
@@ -2431,6 +2565,206 @@
                 <a:cs typeface="Helvetica Neue" pitchFamily="34" charset="-120"/>
               </a:rPr>
               <a:t>Use system or bundled fonts only; anything else is flagged at setup.</a:t>
+            </a:r>
+            <a:endParaRPr lang="en-US" sz="1400" dirty="0"/>
+          </a:p>
+        </p:txBody>
+      </p:sp>
+    </p:spTree>
+  </p:cSld>
+  <p:clrMapOvr>
+    <a:masterClrMapping/>
+  </p:clrMapOvr>
+</p:sld>
+</file>
+
+<file path=ppt/slides/slide7.xml><?xml version="1.0" encoding="utf-8"?>
+<p:sld xmlns:a="http://schemas.openxmlformats.org/drawingml/2006/main" xmlns:r="http://schemas.openxmlformats.org/officeDocument/2006/relationships" xmlns:p="http://schemas.openxmlformats.org/presentationml/2006/main">
+  <p:cSld name="Slide 7">
+    <p:bg>
+      <p:bgPr>
+        <a:solidFill>
+          <a:srgbClr val="F5F3EE"/>
+        </a:solidFill>
+      </p:bgPr>
+    </p:bg>
+    <p:spTree>
+      <p:nvGrpSpPr>
+        <p:cNvPr id="1" name=""/>
+        <p:cNvGrpSpPr/>
+        <p:nvPr/>
+      </p:nvGrpSpPr>
+      <p:grpSpPr>
+        <a:xfrm>
+          <a:off x="0" y="0"/>
+          <a:ext cx="0" cy="0"/>
+          <a:chOff x="0" y="0"/>
+          <a:chExt cx="0" cy="0"/>
+        </a:xfrm>
+      </p:grpSpPr>
+      <p:sp>
+        <p:nvSpPr>
+          <p:cNvPr id="2" name="Text 0"/>
+          <p:cNvSpPr/>
+          <p:nvPr/>
+        </p:nvSpPr>
+        <p:spPr>
+          <a:xfrm>
+            <a:off x="548640" y="457200"/>
+            <a:ext cx="11091672" cy="914400"/>
+          </a:xfrm>
+          <a:prstGeom prst="rect">
+            <a:avLst/>
+          </a:prstGeom>
+          <a:noFill/>
+          <a:ln/>
+        </p:spPr>
+        <p:txBody>
+          <a:bodyPr wrap="square" rtlCol="0" anchor="ctr"/>
+          <a:lstStyle/>
+          <a:p>
+            <a:pPr indent="0" marL="0">
+              <a:buNone/>
+            </a:pPr>
+            <a:r>
+              <a:rPr lang="en-US" sz="3000" b="1" dirty="0">
+                <a:solidFill>
+                  <a:srgbClr val="1B2A4A"/>
+                </a:solidFill>
+                <a:latin typeface="Helvetica Neue" pitchFamily="34" charset="0"/>
+                <a:ea typeface="Helvetica Neue" pitchFamily="34" charset="-122"/>
+                <a:cs typeface="Helvetica Neue" pitchFamily="34" charset="-120"/>
+              </a:rPr>
+              <a:t>Sustainability (continued)</a:t>
+            </a:r>
+            <a:endParaRPr lang="en-US" sz="3000" dirty="0"/>
+          </a:p>
+        </p:txBody>
+      </p:sp>
+      <p:sp>
+        <p:nvSpPr>
+          <p:cNvPr id="3" name="Text 1"/>
+          <p:cNvSpPr/>
+          <p:nvPr/>
+        </p:nvSpPr>
+        <p:spPr>
+          <a:xfrm>
+            <a:off x="548640" y="1554480"/>
+            <a:ext cx="8686800" cy="1828800"/>
+          </a:xfrm>
+          <a:prstGeom prst="rect">
+            <a:avLst/>
+          </a:prstGeom>
+          <a:noFill/>
+          <a:ln/>
+        </p:spPr>
+        <p:txBody>
+          <a:bodyPr wrap="square" rtlCol="0" anchor="t"/>
+          <a:lstStyle/>
+          <a:p>
+            <a:pPr indent="0" marL="0">
+              <a:buNone/>
+            </a:pPr>
+            <a:r>
+              <a:rPr lang="en-US" sz="1600" dirty="0">
+                <a:solidFill>
+                  <a:srgbClr val="333333"/>
+                </a:solidFill>
+                <a:latin typeface="Helvetica Neue" pitchFamily="34" charset="0"/>
+                <a:ea typeface="Helvetica Neue" pitchFamily="34" charset="-122"/>
+                <a:cs typeface="Helvetica Neue" pitchFamily="34" charset="-120"/>
+              </a:rPr>
+              <a:t>A second slide chained from the Sustainability destination via its "Next" button, showing multi-level navigation beyond the Home &lt;-&gt; Destination pair.</a:t>
+            </a:r>
+            <a:endParaRPr lang="en-US" sz="1600" dirty="0"/>
+          </a:p>
+        </p:txBody>
+      </p:sp>
+      <p:sp>
+        <p:nvSpPr>
+          <p:cNvPr id="4" name="BTN_Back">
+            <a:hlinkClick r:id="rId1" tooltip="" action="ppaction://hlinksldjump"/>
+          </p:cNvPr>
+          <p:cNvSpPr/>
+          <p:nvPr/>
+        </p:nvSpPr>
+        <p:spPr>
+          <a:xfrm>
+            <a:off x="548640" y="5943600"/>
+            <a:ext cx="1645920" cy="548640"/>
+          </a:xfrm>
+          <a:prstGeom prst="roundRect">
+            <a:avLst>
+              <a:gd name="adj" fmla="val 25000"/>
+            </a:avLst>
+          </a:prstGeom>
+          <a:solidFill>
+            <a:srgbClr val="2E7D6B"/>
+          </a:solidFill>
+          <a:ln/>
+        </p:spPr>
+        <p:txBody>
+          <a:bodyPr wrap="square" rtlCol="0" anchor="ctr"/>
+          <a:lstStyle/>
+          <a:p>
+            <a:pPr algn="ctr" indent="0" marL="0">
+              <a:buNone/>
+            </a:pPr>
+            <a:r>
+              <a:rPr lang="en-US" sz="1400" b="1" dirty="0">
+                <a:solidFill>
+                  <a:srgbClr val="FFFFFF"/>
+                </a:solidFill>
+                <a:latin typeface="Helvetica Neue" pitchFamily="34" charset="0"/>
+                <a:ea typeface="Helvetica Neue" pitchFamily="34" charset="-122"/>
+                <a:cs typeface="Helvetica Neue" pitchFamily="34" charset="-120"/>
+              </a:rPr>
+              <a:t>Back</a:t>
+            </a:r>
+            <a:endParaRPr lang="en-US" sz="1400" dirty="0"/>
+          </a:p>
+        </p:txBody>
+      </p:sp>
+      <p:sp>
+        <p:nvSpPr>
+          <p:cNvPr id="5" name="BTN_Home">
+            <a:hlinkClick r:id="rId2" tooltip="" action="ppaction://hlinksldjump"/>
+          </p:cNvPr>
+          <p:cNvSpPr/>
+          <p:nvPr/>
+        </p:nvSpPr>
+        <p:spPr>
+          <a:xfrm>
+            <a:off x="2377440" y="5943600"/>
+            <a:ext cx="1645920" cy="548640"/>
+          </a:xfrm>
+          <a:prstGeom prst="roundRect">
+            <a:avLst>
+              <a:gd name="adj" fmla="val 25000"/>
+            </a:avLst>
+          </a:prstGeom>
+          <a:solidFill>
+            <a:srgbClr val="1B2A4A"/>
+          </a:solidFill>
+          <a:ln/>
+        </p:spPr>
+        <p:txBody>
+          <a:bodyPr wrap="square" rtlCol="0" anchor="ctr"/>
+          <a:lstStyle/>
+          <a:p>
+            <a:pPr algn="ctr" indent="0" marL="0">
+              <a:buNone/>
+            </a:pPr>
+            <a:r>
+              <a:rPr lang="en-US" sz="1400" b="1" dirty="0">
+                <a:solidFill>
+                  <a:srgbClr val="FFFFFF"/>
+                </a:solidFill>
+                <a:latin typeface="Helvetica Neue" pitchFamily="34" charset="0"/>
+                <a:ea typeface="Helvetica Neue" pitchFamily="34" charset="-122"/>
+                <a:cs typeface="Helvetica Neue" pitchFamily="34" charset="-120"/>
+              </a:rPr>
+              <a:t>Home</a:t>
             </a:r>
             <a:endParaRPr lang="en-US" sz="1400" dirty="0"/>
           </a:p>
